--- a/00-introduction/unit1b-slides.pptx
+++ b/00-introduction/unit1b-slides.pptx
@@ -225,7 +225,7 @@
           <a:p>
             <a:fld id="{792BC0D5-0843-46CE-B4B3-FDD7262E77E3}" type="datetimeFigureOut">
               <a:rPr lang="he-IL" smtClean="0"/>
-              <a:t>ט'/אדר/תשפ"ו</a:t>
+              <a:t>א'/ניסן/תשפ"ו</a:t>
             </a:fld>
             <a:endParaRPr lang="he-IL"/>
           </a:p>
@@ -1071,7 +1071,7 @@
             <a:fld id="{1D8BD707-D9CF-40AE-B4C6-C98DA3205C09}" type="datetimeFigureOut">
               <a:rPr lang="en-US" smtClean="0"/>
               <a:pPr/>
-              <a:t>2/26/2026</a:t>
+              <a:t>2026-03-19</a:t>
             </a:fld>
             <a:endParaRPr lang="en-US"/>
           </a:p>
@@ -1236,7 +1236,7 @@
             <a:fld id="{1D8BD707-D9CF-40AE-B4C6-C98DA3205C09}" type="datetimeFigureOut">
               <a:rPr lang="en-US" smtClean="0"/>
               <a:pPr/>
-              <a:t>2/26/2026</a:t>
+              <a:t>2026-03-19</a:t>
             </a:fld>
             <a:endParaRPr lang="en-US"/>
           </a:p>
@@ -1411,7 +1411,7 @@
             <a:fld id="{1D8BD707-D9CF-40AE-B4C6-C98DA3205C09}" type="datetimeFigureOut">
               <a:rPr lang="en-US" smtClean="0"/>
               <a:pPr/>
-              <a:t>2/26/2026</a:t>
+              <a:t>2026-03-19</a:t>
             </a:fld>
             <a:endParaRPr lang="en-US"/>
           </a:p>
@@ -1576,7 +1576,7 @@
             <a:fld id="{1D8BD707-D9CF-40AE-B4C6-C98DA3205C09}" type="datetimeFigureOut">
               <a:rPr lang="en-US" smtClean="0"/>
               <a:pPr/>
-              <a:t>2/26/2026</a:t>
+              <a:t>2026-03-19</a:t>
             </a:fld>
             <a:endParaRPr lang="en-US"/>
           </a:p>
@@ -1818,7 +1818,7 @@
             <a:fld id="{1D8BD707-D9CF-40AE-B4C6-C98DA3205C09}" type="datetimeFigureOut">
               <a:rPr lang="en-US" smtClean="0"/>
               <a:pPr/>
-              <a:t>2/26/2026</a:t>
+              <a:t>2026-03-19</a:t>
             </a:fld>
             <a:endParaRPr lang="en-US"/>
           </a:p>
@@ -2100,7 +2100,7 @@
             <a:fld id="{1D8BD707-D9CF-40AE-B4C6-C98DA3205C09}" type="datetimeFigureOut">
               <a:rPr lang="en-US" smtClean="0"/>
               <a:pPr/>
-              <a:t>2/26/2026</a:t>
+              <a:t>2026-03-19</a:t>
             </a:fld>
             <a:endParaRPr lang="en-US"/>
           </a:p>
@@ -2516,7 +2516,7 @@
             <a:fld id="{1D8BD707-D9CF-40AE-B4C6-C98DA3205C09}" type="datetimeFigureOut">
               <a:rPr lang="en-US" smtClean="0"/>
               <a:pPr/>
-              <a:t>2/26/2026</a:t>
+              <a:t>2026-03-19</a:t>
             </a:fld>
             <a:endParaRPr lang="en-US"/>
           </a:p>
@@ -2630,7 +2630,7 @@
             <a:fld id="{1D8BD707-D9CF-40AE-B4C6-C98DA3205C09}" type="datetimeFigureOut">
               <a:rPr lang="en-US" smtClean="0"/>
               <a:pPr/>
-              <a:t>2/26/2026</a:t>
+              <a:t>2026-03-19</a:t>
             </a:fld>
             <a:endParaRPr lang="en-US"/>
           </a:p>
@@ -2722,7 +2722,7 @@
             <a:fld id="{1D8BD707-D9CF-40AE-B4C6-C98DA3205C09}" type="datetimeFigureOut">
               <a:rPr lang="en-US" smtClean="0"/>
               <a:pPr/>
-              <a:t>2/26/2026</a:t>
+              <a:t>2026-03-19</a:t>
             </a:fld>
             <a:endParaRPr lang="en-US"/>
           </a:p>
@@ -2994,7 +2994,7 @@
             <a:fld id="{1D8BD707-D9CF-40AE-B4C6-C98DA3205C09}" type="datetimeFigureOut">
               <a:rPr lang="en-US" smtClean="0"/>
               <a:pPr/>
-              <a:t>2/26/2026</a:t>
+              <a:t>2026-03-19</a:t>
             </a:fld>
             <a:endParaRPr lang="en-US"/>
           </a:p>
@@ -3243,7 +3243,7 @@
             <a:fld id="{1D8BD707-D9CF-40AE-B4C6-C98DA3205C09}" type="datetimeFigureOut">
               <a:rPr lang="en-US" smtClean="0"/>
               <a:pPr/>
-              <a:t>2/26/2026</a:t>
+              <a:t>2026-03-19</a:t>
             </a:fld>
             <a:endParaRPr lang="en-US"/>
           </a:p>
@@ -3451,7 +3451,7 @@
             <a:fld id="{1D8BD707-D9CF-40AE-B4C6-C98DA3205C09}" type="datetimeFigureOut">
               <a:rPr lang="en-US" smtClean="0"/>
               <a:pPr/>
-              <a:t>2/26/2026</a:t>
+              <a:t>2026-03-19</a:t>
             </a:fld>
             <a:endParaRPr lang="en-US"/>
           </a:p>
